--- a/docs/poster/variants/v24.pptx
+++ b/docs/poster/variants/v24.pptx
@@ -4221,6 +4221,90 @@
               </a:spcAft>
             </a:pPr>
             <a:r>
+              <a:rPr sz="6200" b="1">
+                <a:solidFill>
+                  <a:srgbClr val="8A4B1E"/>
+                </a:solidFill>
+                <a:latin typeface="Arial Narrow"/>
+              </a:rPr>
+              <a:t>14</a:t>
+            </a:r>
+          </a:p>
+        </p:txBody>
+      </p:sp>
+      <p:sp>
+        <p:nvSpPr>
+          <p:cNvPr id="29" name="TextBox 28"/>
+          <p:cNvSpPr txBox="1"/>
+          <p:nvPr/>
+        </p:nvSpPr>
+        <p:spPr>
+          <a:xfrm>
+            <a:off x="731520" y="11738864"/>
+            <a:ext cx="10607040" cy="365760"/>
+          </a:xfrm>
+          <a:prstGeom prst="rect">
+            <a:avLst/>
+          </a:prstGeom>
+          <a:noFill/>
+        </p:spPr>
+        <p:txBody>
+          <a:bodyPr wrap="square" lIns="0" rIns="0" tIns="0" bIns="0">
+            <a:spAutoFit/>
+          </a:bodyPr>
+          <a:lstStyle/>
+          <a:p>
+            <a:pPr algn="l">
+              <a:lnSpc>
+                <a:spcPct val="122000"/>
+              </a:lnSpc>
+              <a:spcAft>
+                <a:spcPts val="600"/>
+              </a:spcAft>
+            </a:pPr>
+            <a:r>
+              <a:rPr sz="1600" b="0">
+                <a:solidFill>
+                  <a:srgbClr val="6E6759"/>
+                </a:solidFill>
+                <a:latin typeface="Arial"/>
+              </a:rPr>
+              <a:t>analysis tools the planner can choose from</a:t>
+            </a:r>
+          </a:p>
+        </p:txBody>
+      </p:sp>
+      <p:sp>
+        <p:nvSpPr>
+          <p:cNvPr id="30" name="TextBox 29"/>
+          <p:cNvSpPr txBox="1"/>
+          <p:nvPr/>
+        </p:nvSpPr>
+        <p:spPr>
+          <a:xfrm>
+            <a:off x="731520" y="12209272"/>
+            <a:ext cx="10607040" cy="365760"/>
+          </a:xfrm>
+          <a:prstGeom prst="rect">
+            <a:avLst/>
+          </a:prstGeom>
+          <a:noFill/>
+        </p:spPr>
+        <p:txBody>
+          <a:bodyPr wrap="square" lIns="0" rIns="0" tIns="0" bIns="0">
+            <a:spAutoFit/>
+          </a:bodyPr>
+          <a:lstStyle/>
+          <a:p>
+            <a:pPr algn="l">
+              <a:lnSpc>
+                <a:spcPct val="95000"/>
+              </a:lnSpc>
+              <a:spcAft>
+                <a:spcPts val="0"/>
+              </a:spcAft>
+            </a:pPr>
+            <a:r>
               <a:rPr sz="3400" b="1">
                 <a:solidFill>
                   <a:srgbClr val="2B2A26"/>
@@ -4234,13 +4318,13 @@
       </p:sp>
       <p:sp>
         <p:nvSpPr>
-          <p:cNvPr id="29" name="Rectangle 28"/>
+          <p:cNvPr id="31" name="Rectangle 30"/>
           <p:cNvSpPr/>
           <p:nvPr/>
         </p:nvSpPr>
         <p:spPr>
           <a:xfrm>
-            <a:off x="731520" y="11497056"/>
+            <a:off x="731520" y="12770612"/>
             <a:ext cx="10607040" cy="27432"/>
           </a:xfrm>
           <a:prstGeom prst="rect">
@@ -4278,13 +4362,13 @@
       </p:sp>
       <p:sp>
         <p:nvSpPr>
-          <p:cNvPr id="30" name="TextBox 29"/>
+          <p:cNvPr id="32" name="TextBox 31"/>
           <p:cNvSpPr txBox="1"/>
           <p:nvPr/>
         </p:nvSpPr>
         <p:spPr>
           <a:xfrm>
-            <a:off x="731520" y="11826239"/>
+            <a:off x="731520" y="13099796"/>
             <a:ext cx="10607040" cy="365760"/>
           </a:xfrm>
           <a:prstGeom prst="rect">
@@ -4320,13 +4404,13 @@
       </p:sp>
       <p:sp>
         <p:nvSpPr>
-          <p:cNvPr id="31" name="TextBox 30"/>
+          <p:cNvPr id="33" name="TextBox 32"/>
           <p:cNvSpPr txBox="1"/>
           <p:nvPr/>
         </p:nvSpPr>
         <p:spPr>
           <a:xfrm>
-            <a:off x="731520" y="13627607"/>
+            <a:off x="731520" y="14901164"/>
             <a:ext cx="10607040" cy="365760"/>
           </a:xfrm>
           <a:prstGeom prst="rect">
@@ -4349,6 +4433,90 @@
               </a:spcAft>
             </a:pPr>
             <a:r>
+              <a:rPr sz="6200" b="1">
+                <a:solidFill>
+                  <a:srgbClr val="8A4B1E"/>
+                </a:solidFill>
+                <a:latin typeface="Arial Narrow"/>
+              </a:rPr>
+              <a:t>92</a:t>
+            </a:r>
+          </a:p>
+        </p:txBody>
+      </p:sp>
+      <p:sp>
+        <p:nvSpPr>
+          <p:cNvPr id="34" name="TextBox 33"/>
+          <p:cNvSpPr txBox="1"/>
+          <p:nvPr/>
+        </p:nvSpPr>
+        <p:spPr>
+          <a:xfrm>
+            <a:off x="731520" y="15704312"/>
+            <a:ext cx="10607040" cy="365760"/>
+          </a:xfrm>
+          <a:prstGeom prst="rect">
+            <a:avLst/>
+          </a:prstGeom>
+          <a:noFill/>
+        </p:spPr>
+        <p:txBody>
+          <a:bodyPr wrap="square" lIns="0" rIns="0" tIns="0" bIns="0">
+            <a:spAutoFit/>
+          </a:bodyPr>
+          <a:lstStyle/>
+          <a:p>
+            <a:pPr algn="l">
+              <a:lnSpc>
+                <a:spcPct val="122000"/>
+              </a:lnSpc>
+              <a:spcAft>
+                <a:spcPts val="600"/>
+              </a:spcAft>
+            </a:pPr>
+            <a:r>
+              <a:rPr sz="1600" b="0">
+                <a:solidFill>
+                  <a:srgbClr val="6E6759"/>
+                </a:solidFill>
+                <a:latin typeface="Arial"/>
+              </a:rPr>
+              <a:t>questions asked of a dataset so far</a:t>
+            </a:r>
+          </a:p>
+        </p:txBody>
+      </p:sp>
+      <p:sp>
+        <p:nvSpPr>
+          <p:cNvPr id="35" name="TextBox 34"/>
+          <p:cNvSpPr txBox="1"/>
+          <p:nvPr/>
+        </p:nvSpPr>
+        <p:spPr>
+          <a:xfrm>
+            <a:off x="731520" y="16174720"/>
+            <a:ext cx="10607040" cy="365760"/>
+          </a:xfrm>
+          <a:prstGeom prst="rect">
+            <a:avLst/>
+          </a:prstGeom>
+          <a:noFill/>
+        </p:spPr>
+        <p:txBody>
+          <a:bodyPr wrap="square" lIns="0" rIns="0" tIns="0" bIns="0">
+            <a:spAutoFit/>
+          </a:bodyPr>
+          <a:lstStyle/>
+          <a:p>
+            <a:pPr algn="l">
+              <a:lnSpc>
+                <a:spcPct val="95000"/>
+              </a:lnSpc>
+              <a:spcAft>
+                <a:spcPts val="0"/>
+              </a:spcAft>
+            </a:pPr>
+            <a:r>
               <a:rPr sz="3400" b="1">
                 <a:solidFill>
                   <a:srgbClr val="2B2A26"/>
@@ -4362,13 +4530,13 @@
       </p:sp>
       <p:sp>
         <p:nvSpPr>
-          <p:cNvPr id="32" name="Rectangle 31"/>
+          <p:cNvPr id="36" name="Rectangle 35"/>
           <p:cNvSpPr/>
           <p:nvPr/>
         </p:nvSpPr>
         <p:spPr>
           <a:xfrm>
-            <a:off x="731520" y="14188947"/>
+            <a:off x="731520" y="16736060"/>
             <a:ext cx="10607040" cy="27432"/>
           </a:xfrm>
           <a:prstGeom prst="rect">
@@ -4406,13 +4574,13 @@
       </p:sp>
       <p:sp>
         <p:nvSpPr>
-          <p:cNvPr id="33" name="TextBox 32"/>
+          <p:cNvPr id="37" name="TextBox 36"/>
           <p:cNvSpPr txBox="1"/>
           <p:nvPr/>
         </p:nvSpPr>
         <p:spPr>
           <a:xfrm>
-            <a:off x="731520" y="14518131"/>
+            <a:off x="731520" y="17065244"/>
             <a:ext cx="10607040" cy="365760"/>
           </a:xfrm>
           <a:prstGeom prst="rect">
@@ -4448,13 +4616,13 @@
       </p:sp>
       <p:sp>
         <p:nvSpPr>
-          <p:cNvPr id="34" name="TextBox 33"/>
+          <p:cNvPr id="38" name="TextBox 37"/>
           <p:cNvSpPr txBox="1"/>
           <p:nvPr/>
         </p:nvSpPr>
         <p:spPr>
           <a:xfrm>
-            <a:off x="731520" y="16319500"/>
+            <a:off x="731520" y="18866612"/>
             <a:ext cx="10607040" cy="365760"/>
           </a:xfrm>
           <a:prstGeom prst="rect">
@@ -4490,13 +4658,13 @@
       </p:sp>
       <p:sp>
         <p:nvSpPr>
-          <p:cNvPr id="35" name="Rectangle 34"/>
+          <p:cNvPr id="39" name="Rectangle 38"/>
           <p:cNvSpPr/>
           <p:nvPr/>
         </p:nvSpPr>
         <p:spPr>
           <a:xfrm>
-            <a:off x="731520" y="16880839"/>
+            <a:off x="731520" y="19427952"/>
             <a:ext cx="10607040" cy="27432"/>
           </a:xfrm>
           <a:prstGeom prst="rect">
@@ -4534,13 +4702,13 @@
       </p:sp>
       <p:sp>
         <p:nvSpPr>
-          <p:cNvPr id="36" name="TextBox 35"/>
+          <p:cNvPr id="40" name="TextBox 39"/>
           <p:cNvSpPr txBox="1"/>
           <p:nvPr/>
         </p:nvSpPr>
         <p:spPr>
           <a:xfrm>
-            <a:off x="731520" y="17210023"/>
+            <a:off x="731520" y="19757136"/>
             <a:ext cx="10607040" cy="365760"/>
           </a:xfrm>
           <a:prstGeom prst="rect">
@@ -4569,20 +4737,20 @@
                 </a:solidFill>
                 <a:latin typeface="Arial"/>
               </a:rPr>
-              <a:t>A new robot needs a project, an API key and a session start. The ingest contract is the same for every vehicle: start a session, post sensor batches and frames while driving, stop. The platform does not care what the robot is. The Unitree humanoid's project exists on this basis and is waiting on its first upload.</a:t>
-            </a:r>
-          </a:p>
-        </p:txBody>
-      </p:sp>
-      <p:sp>
-        <p:nvSpPr>
-          <p:cNvPr id="37" name="TextBox 36"/>
+              <a:t>A new robot needs a project, an API key and a session start. The ingest contract is the same for every vehicle: open a session, post sensor batches and frames while driving, stop. The platform does not care what the robot is. Empty projects for a mobile robot and a humanoid already sit on it, waiting for a first upload.</a:t>
+            </a:r>
+          </a:p>
+        </p:txBody>
+      </p:sp>
+      <p:sp>
+        <p:nvSpPr>
+          <p:cNvPr id="41" name="TextBox 40"/>
           <p:cNvSpPr txBox="1"/>
           <p:nvPr/>
         </p:nvSpPr>
         <p:spPr>
           <a:xfrm>
-            <a:off x="731520" y="19011392"/>
+            <a:off x="731520" y="21558504"/>
             <a:ext cx="10607040" cy="365760"/>
           </a:xfrm>
           <a:prstGeom prst="rect">
@@ -4618,13 +4786,13 @@
       </p:sp>
       <p:sp>
         <p:nvSpPr>
-          <p:cNvPr id="38" name="Rectangle 37"/>
+          <p:cNvPr id="42" name="Rectangle 41"/>
           <p:cNvSpPr/>
           <p:nvPr/>
         </p:nvSpPr>
         <p:spPr>
           <a:xfrm>
-            <a:off x="731520" y="19572732"/>
+            <a:off x="731520" y="22119844"/>
             <a:ext cx="10607040" cy="27432"/>
           </a:xfrm>
           <a:prstGeom prst="rect">
@@ -4662,13 +4830,13 @@
       </p:sp>
       <p:sp>
         <p:nvSpPr>
-          <p:cNvPr id="39" name="TextBox 38"/>
+          <p:cNvPr id="43" name="TextBox 42"/>
           <p:cNvSpPr txBox="1"/>
           <p:nvPr/>
         </p:nvSpPr>
         <p:spPr>
           <a:xfrm>
-            <a:off x="731520" y="19901916"/>
+            <a:off x="731520" y="22449028"/>
             <a:ext cx="10607040" cy="365760"/>
           </a:xfrm>
           <a:prstGeom prst="rect">
@@ -4704,13 +4872,13 @@
       </p:sp>
       <p:sp>
         <p:nvSpPr>
-          <p:cNvPr id="40" name="TextBox 39"/>
+          <p:cNvPr id="44" name="TextBox 43"/>
           <p:cNvSpPr txBox="1"/>
           <p:nvPr/>
         </p:nvSpPr>
         <p:spPr>
           <a:xfrm>
-            <a:off x="731520" y="22013164"/>
+            <a:off x="731520" y="24560276"/>
             <a:ext cx="10607040" cy="365760"/>
           </a:xfrm>
           <a:prstGeom prst="rect">
@@ -4746,13 +4914,13 @@
       </p:sp>
       <p:sp>
         <p:nvSpPr>
-          <p:cNvPr id="41" name="Rectangle 40"/>
+          <p:cNvPr id="45" name="Rectangle 44"/>
           <p:cNvSpPr/>
           <p:nvPr/>
         </p:nvSpPr>
         <p:spPr>
           <a:xfrm>
-            <a:off x="731520" y="22574504"/>
+            <a:off x="731520" y="25121616"/>
             <a:ext cx="10607040" cy="27432"/>
           </a:xfrm>
           <a:prstGeom prst="rect">
@@ -4790,13 +4958,13 @@
       </p:sp>
       <p:sp>
         <p:nvSpPr>
-          <p:cNvPr id="42" name="TextBox 41"/>
+          <p:cNvPr id="46" name="TextBox 45"/>
           <p:cNvSpPr txBox="1"/>
           <p:nvPr/>
         </p:nvSpPr>
         <p:spPr>
           <a:xfrm>
-            <a:off x="731520" y="22903688"/>
+            <a:off x="731520" y="25450800"/>
             <a:ext cx="10607040" cy="365760"/>
           </a:xfrm>
           <a:prstGeom prst="rect">
@@ -4832,7 +5000,7 @@
       </p:sp>
       <p:sp>
         <p:nvSpPr>
-          <p:cNvPr id="43" name="TextBox 42"/>
+          <p:cNvPr id="47" name="TextBox 46"/>
           <p:cNvSpPr txBox="1"/>
           <p:nvPr/>
         </p:nvSpPr>
@@ -4874,7 +5042,7 @@
       </p:sp>
       <p:sp>
         <p:nvSpPr>
-          <p:cNvPr id="44" name="Rectangle 43"/>
+          <p:cNvPr id="48" name="Rectangle 47"/>
           <p:cNvSpPr/>
           <p:nvPr/>
         </p:nvSpPr>
@@ -4918,7 +5086,7 @@
       </p:sp>
       <p:sp>
         <p:nvSpPr>
-          <p:cNvPr id="45" name="TextBox 44"/>
+          <p:cNvPr id="49" name="TextBox 48"/>
           <p:cNvSpPr txBox="1"/>
           <p:nvPr/>
         </p:nvSpPr>
@@ -4953,14 +5121,14 @@
                 </a:solidFill>
                 <a:latin typeface="Arial"/>
               </a:rPr>
-              <a:t>Robot 241 is a tracked rover that drives crop rows and streams camera, GPS and two IMUs. The laser cart carries the weeder: a galvanometer laser, a down camera over the work zone and a forward camera. A Unitree humanoid has a project and has uploaded nothing yet. Between them the two ground vehicles have recorded 2,686 frames in 26 drives.</a:t>
-            </a:r>
-          </a:p>
-        </p:txBody>
-      </p:sp>
-      <p:sp>
-        <p:nvSpPr>
-          <p:cNvPr id="46" name="TextBox 45"/>
+              <a:t>Robot 241 is a tracked rover that drives crop rows and streams camera, GPS and two IMUs. The laser cart carries the weeder: a galvanometer laser, a down camera over the work zone and a forward camera. Ten projects sit on the platform and two of them have a robot reporting into them. Between those two vehicles, 2,686 frames in 26 drives.</a:t>
+            </a:r>
+          </a:p>
+        </p:txBody>
+      </p:sp>
+      <p:sp>
+        <p:nvSpPr>
+          <p:cNvPr id="50" name="TextBox 49"/>
           <p:cNvSpPr txBox="1"/>
           <p:nvPr/>
         </p:nvSpPr>
@@ -5002,7 +5170,7 @@
       </p:sp>
       <p:sp>
         <p:nvSpPr>
-          <p:cNvPr id="47" name="Rectangle 46"/>
+          <p:cNvPr id="51" name="Rectangle 50"/>
           <p:cNvSpPr/>
           <p:nvPr/>
         </p:nvSpPr>
@@ -5046,7 +5214,7 @@
       </p:sp>
       <p:sp>
         <p:nvSpPr>
-          <p:cNvPr id="48" name="TextBox 47"/>
+          <p:cNvPr id="52" name="TextBox 51"/>
           <p:cNvSpPr txBox="1"/>
           <p:nvPr/>
         </p:nvSpPr>
@@ -5088,7 +5256,7 @@
       </p:sp>
       <p:sp>
         <p:nvSpPr>
-          <p:cNvPr id="49" name="TextBox 48"/>
+          <p:cNvPr id="53" name="TextBox 52"/>
           <p:cNvSpPr txBox="1"/>
           <p:nvPr/>
         </p:nvSpPr>
@@ -5130,7 +5298,7 @@
       </p:sp>
       <p:sp>
         <p:nvSpPr>
-          <p:cNvPr id="50" name="Rectangle 49"/>
+          <p:cNvPr id="54" name="Rectangle 53"/>
           <p:cNvSpPr/>
           <p:nvPr/>
         </p:nvSpPr>
@@ -5174,7 +5342,7 @@
       </p:sp>
       <p:sp>
         <p:nvSpPr>
-          <p:cNvPr id="51" name="TextBox 50"/>
+          <p:cNvPr id="55" name="TextBox 54"/>
           <p:cNvSpPr txBox="1"/>
           <p:nvPr/>
         </p:nvSpPr>
@@ -5216,7 +5384,7 @@
       </p:sp>
       <p:sp>
         <p:nvSpPr>
-          <p:cNvPr id="52" name="TextBox 51"/>
+          <p:cNvPr id="56" name="TextBox 55"/>
           <p:cNvSpPr txBox="1"/>
           <p:nvPr/>
         </p:nvSpPr>
@@ -5258,7 +5426,7 @@
       </p:sp>
       <p:sp>
         <p:nvSpPr>
-          <p:cNvPr id="53" name="Rectangle 52"/>
+          <p:cNvPr id="57" name="Rectangle 56"/>
           <p:cNvSpPr/>
           <p:nvPr/>
         </p:nvSpPr>
@@ -5302,7 +5470,7 @@
       </p:sp>
       <p:sp>
         <p:nvSpPr>
-          <p:cNvPr id="54" name="TextBox 53"/>
+          <p:cNvPr id="58" name="TextBox 57"/>
           <p:cNvSpPr txBox="1"/>
           <p:nvPr/>
         </p:nvSpPr>
@@ -5344,7 +5512,7 @@
       </p:sp>
       <p:sp>
         <p:nvSpPr>
-          <p:cNvPr id="55" name="TextBox 54"/>
+          <p:cNvPr id="59" name="TextBox 58"/>
           <p:cNvSpPr txBox="1"/>
           <p:nvPr/>
         </p:nvSpPr>
@@ -5386,7 +5554,7 @@
       </p:sp>
       <p:sp>
         <p:nvSpPr>
-          <p:cNvPr id="56" name="Rectangle 55"/>
+          <p:cNvPr id="60" name="Rectangle 59"/>
           <p:cNvSpPr/>
           <p:nvPr/>
         </p:nvSpPr>
@@ -5430,7 +5598,7 @@
       </p:sp>
       <p:sp>
         <p:nvSpPr>
-          <p:cNvPr id="57" name="TextBox 56"/>
+          <p:cNvPr id="61" name="TextBox 60"/>
           <p:cNvSpPr txBox="1"/>
           <p:nvPr/>
         </p:nvSpPr>
@@ -5472,7 +5640,7 @@
       </p:sp>
       <p:sp>
         <p:nvSpPr>
-          <p:cNvPr id="58" name="TextBox 57"/>
+          <p:cNvPr id="62" name="TextBox 61"/>
           <p:cNvSpPr txBox="1"/>
           <p:nvPr/>
         </p:nvSpPr>
@@ -5501,6 +5669,90 @@
               </a:spcAft>
             </a:pPr>
             <a:r>
+              <a:rPr sz="6200" b="1">
+                <a:solidFill>
+                  <a:srgbClr val="8A4B1E"/>
+                </a:solidFill>
+                <a:latin typeface="Arial Narrow"/>
+              </a:rPr>
+              <a:t>162</a:t>
+            </a:r>
+          </a:p>
+        </p:txBody>
+      </p:sp>
+      <p:sp>
+        <p:nvSpPr>
+          <p:cNvPr id="63" name="TextBox 62"/>
+          <p:cNvSpPr txBox="1"/>
+          <p:nvPr/>
+        </p:nvSpPr>
+        <p:spPr>
+          <a:xfrm>
+            <a:off x="11704320" y="21886672"/>
+            <a:ext cx="9989820" cy="365760"/>
+          </a:xfrm>
+          <a:prstGeom prst="rect">
+            <a:avLst/>
+          </a:prstGeom>
+          <a:noFill/>
+        </p:spPr>
+        <p:txBody>
+          <a:bodyPr wrap="square" lIns="0" rIns="0" tIns="0" bIns="0">
+            <a:spAutoFit/>
+          </a:bodyPr>
+          <a:lstStyle/>
+          <a:p>
+            <a:pPr algn="l">
+              <a:lnSpc>
+                <a:spcPct val="122000"/>
+              </a:lnSpc>
+              <a:spcAft>
+                <a:spcPts val="600"/>
+              </a:spcAft>
+            </a:pPr>
+            <a:r>
+              <a:rPr sz="1600" b="0">
+                <a:solidFill>
+                  <a:srgbClr val="6E6759"/>
+                </a:solidFill>
+                <a:latin typeface="Arial"/>
+              </a:rPr>
+              <a:t>real failures frozen as a benchmark</a:t>
+            </a:r>
+          </a:p>
+        </p:txBody>
+      </p:sp>
+      <p:sp>
+        <p:nvSpPr>
+          <p:cNvPr id="64" name="TextBox 63"/>
+          <p:cNvSpPr txBox="1"/>
+          <p:nvPr/>
+        </p:nvSpPr>
+        <p:spPr>
+          <a:xfrm>
+            <a:off x="11704320" y="22357080"/>
+            <a:ext cx="9989820" cy="365760"/>
+          </a:xfrm>
+          <a:prstGeom prst="rect">
+            <a:avLst/>
+          </a:prstGeom>
+          <a:noFill/>
+        </p:spPr>
+        <p:txBody>
+          <a:bodyPr wrap="square" lIns="0" rIns="0" tIns="0" bIns="0">
+            <a:spAutoFit/>
+          </a:bodyPr>
+          <a:lstStyle/>
+          <a:p>
+            <a:pPr algn="l">
+              <a:lnSpc>
+                <a:spcPct val="95000"/>
+              </a:lnSpc>
+              <a:spcAft>
+                <a:spcPts val="0"/>
+              </a:spcAft>
+            </a:pPr>
+            <a:r>
               <a:rPr sz="3400" b="1">
                 <a:solidFill>
                   <a:srgbClr val="2B2A26"/>
@@ -5514,13 +5766,13 @@
       </p:sp>
       <p:sp>
         <p:nvSpPr>
-          <p:cNvPr id="59" name="Rectangle 58"/>
+          <p:cNvPr id="65" name="Rectangle 64"/>
           <p:cNvSpPr/>
           <p:nvPr/>
         </p:nvSpPr>
         <p:spPr>
           <a:xfrm>
-            <a:off x="11704320" y="21644864"/>
+            <a:off x="11704320" y="22918420"/>
             <a:ext cx="9989820" cy="27432"/>
           </a:xfrm>
           <a:prstGeom prst="rect">
@@ -5558,13 +5810,13 @@
       </p:sp>
       <p:sp>
         <p:nvSpPr>
-          <p:cNvPr id="60" name="TextBox 59"/>
+          <p:cNvPr id="66" name="TextBox 65"/>
           <p:cNvSpPr txBox="1"/>
           <p:nvPr/>
         </p:nvSpPr>
         <p:spPr>
           <a:xfrm>
-            <a:off x="11704320" y="21974048"/>
+            <a:off x="11704320" y="23247604"/>
             <a:ext cx="9989820" cy="365760"/>
           </a:xfrm>
           <a:prstGeom prst="rect">
@@ -5600,7 +5852,7 @@
       </p:sp>
       <p:sp>
         <p:nvSpPr>
-          <p:cNvPr id="61" name="TextBox 60"/>
+          <p:cNvPr id="67" name="TextBox 66"/>
           <p:cNvSpPr txBox="1"/>
           <p:nvPr/>
         </p:nvSpPr>
@@ -5642,7 +5894,7 @@
       </p:sp>
       <p:sp>
         <p:nvSpPr>
-          <p:cNvPr id="62" name="Rectangle 61"/>
+          <p:cNvPr id="68" name="Rectangle 67"/>
           <p:cNvSpPr/>
           <p:nvPr/>
         </p:nvSpPr>
@@ -5686,7 +5938,7 @@
       </p:sp>
       <p:sp>
         <p:nvSpPr>
-          <p:cNvPr id="63" name="TextBox 62"/>
+          <p:cNvPr id="69" name="TextBox 68"/>
           <p:cNvSpPr txBox="1"/>
           <p:nvPr/>
         </p:nvSpPr>
@@ -5728,7 +5980,7 @@
       </p:sp>
       <p:sp>
         <p:nvSpPr>
-          <p:cNvPr id="64" name="TextBox 63"/>
+          <p:cNvPr id="70" name="TextBox 69"/>
           <p:cNvSpPr txBox="1"/>
           <p:nvPr/>
         </p:nvSpPr>
@@ -5770,7 +6022,7 @@
       </p:sp>
       <p:sp>
         <p:nvSpPr>
-          <p:cNvPr id="65" name="Rectangle 64"/>
+          <p:cNvPr id="71" name="Rectangle 70"/>
           <p:cNvSpPr/>
           <p:nvPr/>
         </p:nvSpPr>
@@ -5814,7 +6066,7 @@
       </p:sp>
       <p:sp>
         <p:nvSpPr>
-          <p:cNvPr id="66" name="TextBox 65"/>
+          <p:cNvPr id="72" name="TextBox 71"/>
           <p:cNvSpPr txBox="1"/>
           <p:nvPr/>
         </p:nvSpPr>
@@ -5856,7 +6108,7 @@
       </p:sp>
       <p:sp>
         <p:nvSpPr>
-          <p:cNvPr id="67" name="TextBox 66"/>
+          <p:cNvPr id="73" name="TextBox 72"/>
           <p:cNvSpPr txBox="1"/>
           <p:nvPr/>
         </p:nvSpPr>
@@ -5898,7 +6150,7 @@
       </p:sp>
       <p:sp>
         <p:nvSpPr>
-          <p:cNvPr id="68" name="Rectangle 67"/>
+          <p:cNvPr id="74" name="Rectangle 73"/>
           <p:cNvSpPr/>
           <p:nvPr/>
         </p:nvSpPr>
@@ -5942,7 +6194,7 @@
       </p:sp>
       <p:sp>
         <p:nvSpPr>
-          <p:cNvPr id="69" name="TextBox 68"/>
+          <p:cNvPr id="75" name="TextBox 74"/>
           <p:cNvSpPr txBox="1"/>
           <p:nvPr/>
         </p:nvSpPr>
@@ -5984,7 +6236,7 @@
       </p:sp>
       <p:sp>
         <p:nvSpPr>
-          <p:cNvPr id="70" name="TextBox 69"/>
+          <p:cNvPr id="76" name="TextBox 75"/>
           <p:cNvSpPr txBox="1"/>
           <p:nvPr/>
         </p:nvSpPr>
@@ -6026,7 +6278,7 @@
       </p:sp>
       <p:sp>
         <p:nvSpPr>
-          <p:cNvPr id="71" name="Rectangle 70"/>
+          <p:cNvPr id="77" name="Rectangle 76"/>
           <p:cNvSpPr/>
           <p:nvPr/>
         </p:nvSpPr>
@@ -6070,7 +6322,7 @@
       </p:sp>
       <p:sp>
         <p:nvSpPr>
-          <p:cNvPr id="72" name="TextBox 71"/>
+          <p:cNvPr id="78" name="TextBox 77"/>
           <p:cNvSpPr txBox="1"/>
           <p:nvPr/>
         </p:nvSpPr>
@@ -6112,7 +6364,7 @@
       </p:sp>
       <p:sp>
         <p:nvSpPr>
-          <p:cNvPr id="73" name="TextBox 72"/>
+          <p:cNvPr id="79" name="TextBox 78"/>
           <p:cNvSpPr txBox="1"/>
           <p:nvPr/>
         </p:nvSpPr>
@@ -6141,6 +6393,90 @@
               </a:spcAft>
             </a:pPr>
             <a:r>
+              <a:rPr sz="6200" b="1">
+                <a:solidFill>
+                  <a:srgbClr val="8A4B1E"/>
+                </a:solidFill>
+                <a:latin typeface="Arial Narrow"/>
+              </a:rPr>
+              <a:t>26</a:t>
+            </a:r>
+          </a:p>
+        </p:txBody>
+      </p:sp>
+      <p:sp>
+        <p:nvSpPr>
+          <p:cNvPr id="80" name="TextBox 79"/>
+          <p:cNvSpPr txBox="1"/>
+          <p:nvPr/>
+        </p:nvSpPr>
+        <p:spPr>
+          <a:xfrm>
+            <a:off x="22059900" y="19504660"/>
+            <a:ext cx="9989820" cy="365760"/>
+          </a:xfrm>
+          <a:prstGeom prst="rect">
+            <a:avLst/>
+          </a:prstGeom>
+          <a:noFill/>
+        </p:spPr>
+        <p:txBody>
+          <a:bodyPr wrap="square" lIns="0" rIns="0" tIns="0" bIns="0">
+            <a:spAutoFit/>
+          </a:bodyPr>
+          <a:lstStyle/>
+          <a:p>
+            <a:pPr algn="l">
+              <a:lnSpc>
+                <a:spcPct val="122000"/>
+              </a:lnSpc>
+              <a:spcAft>
+                <a:spcPts val="600"/>
+              </a:spcAft>
+            </a:pPr>
+            <a:r>
+              <a:rPr sz="1600" b="0">
+                <a:solidFill>
+                  <a:srgbClr val="6E6759"/>
+                </a:solidFill>
+                <a:latin typeface="Arial"/>
+              </a:rPr>
+              <a:t>live drives diagnosed without being asked</a:t>
+            </a:r>
+          </a:p>
+        </p:txBody>
+      </p:sp>
+      <p:sp>
+        <p:nvSpPr>
+          <p:cNvPr id="81" name="TextBox 80"/>
+          <p:cNvSpPr txBox="1"/>
+          <p:nvPr/>
+        </p:nvSpPr>
+        <p:spPr>
+          <a:xfrm>
+            <a:off x="22059900" y="19975068"/>
+            <a:ext cx="9989820" cy="365760"/>
+          </a:xfrm>
+          <a:prstGeom prst="rect">
+            <a:avLst/>
+          </a:prstGeom>
+          <a:noFill/>
+        </p:spPr>
+        <p:txBody>
+          <a:bodyPr wrap="square" lIns="0" rIns="0" tIns="0" bIns="0">
+            <a:spAutoFit/>
+          </a:bodyPr>
+          <a:lstStyle/>
+          <a:p>
+            <a:pPr algn="l">
+              <a:lnSpc>
+                <a:spcPct val="95000"/>
+              </a:lnSpc>
+              <a:spcAft>
+                <a:spcPts val="0"/>
+              </a:spcAft>
+            </a:pPr>
+            <a:r>
               <a:rPr sz="3400" b="1">
                 <a:solidFill>
                   <a:srgbClr val="2B2A26"/>
@@ -6154,13 +6490,13 @@
       </p:sp>
       <p:sp>
         <p:nvSpPr>
-          <p:cNvPr id="74" name="Rectangle 73"/>
+          <p:cNvPr id="82" name="Rectangle 81"/>
           <p:cNvSpPr/>
           <p:nvPr/>
         </p:nvSpPr>
         <p:spPr>
           <a:xfrm>
-            <a:off x="22059900" y="19262852"/>
+            <a:off x="22059900" y="20536407"/>
             <a:ext cx="9989820" cy="27432"/>
           </a:xfrm>
           <a:prstGeom prst="rect">
@@ -6198,13 +6534,13 @@
       </p:sp>
       <p:sp>
         <p:nvSpPr>
-          <p:cNvPr id="75" name="TextBox 74"/>
+          <p:cNvPr id="83" name="TextBox 82"/>
           <p:cNvSpPr txBox="1"/>
           <p:nvPr/>
         </p:nvSpPr>
         <p:spPr>
           <a:xfrm>
-            <a:off x="22059900" y="19592036"/>
+            <a:off x="22059900" y="20865591"/>
             <a:ext cx="9989820" cy="365760"/>
           </a:xfrm>
           <a:prstGeom prst="rect">
@@ -6240,13 +6576,13 @@
       </p:sp>
       <p:sp>
         <p:nvSpPr>
-          <p:cNvPr id="76" name="TextBox 75"/>
+          <p:cNvPr id="84" name="TextBox 83"/>
           <p:cNvSpPr txBox="1"/>
           <p:nvPr/>
         </p:nvSpPr>
         <p:spPr>
           <a:xfrm>
-            <a:off x="22059900" y="21393404"/>
+            <a:off x="22059900" y="22666960"/>
             <a:ext cx="9989820" cy="365760"/>
           </a:xfrm>
           <a:prstGeom prst="rect">
@@ -6282,13 +6618,13 @@
       </p:sp>
       <p:sp>
         <p:nvSpPr>
-          <p:cNvPr id="77" name="Rectangle 76"/>
+          <p:cNvPr id="85" name="Rectangle 84"/>
           <p:cNvSpPr/>
           <p:nvPr/>
         </p:nvSpPr>
         <p:spPr>
           <a:xfrm>
-            <a:off x="22059900" y="21954744"/>
+            <a:off x="22059900" y="23228300"/>
             <a:ext cx="9989820" cy="27432"/>
           </a:xfrm>
           <a:prstGeom prst="rect">
@@ -6326,13 +6662,13 @@
       </p:sp>
       <p:sp>
         <p:nvSpPr>
-          <p:cNvPr id="78" name="TextBox 77"/>
+          <p:cNvPr id="86" name="TextBox 85"/>
           <p:cNvSpPr txBox="1"/>
           <p:nvPr/>
         </p:nvSpPr>
         <p:spPr>
           <a:xfrm>
-            <a:off x="22059900" y="22283928"/>
+            <a:off x="22059900" y="23557484"/>
             <a:ext cx="9989820" cy="365760"/>
           </a:xfrm>
           <a:prstGeom prst="rect">
@@ -6368,7 +6704,7 @@
       </p:sp>
       <p:sp>
         <p:nvSpPr>
-          <p:cNvPr id="79" name="TextBox 78"/>
+          <p:cNvPr id="87" name="TextBox 86"/>
           <p:cNvSpPr txBox="1"/>
           <p:nvPr/>
         </p:nvSpPr>
@@ -6397,6 +6733,90 @@
               </a:spcAft>
             </a:pPr>
             <a:r>
+              <a:rPr sz="6200" b="1">
+                <a:solidFill>
+                  <a:srgbClr val="8A4B1E"/>
+                </a:solidFill>
+                <a:latin typeface="Arial Narrow"/>
+              </a:rPr>
+              <a:t>1,389</a:t>
+            </a:r>
+          </a:p>
+        </p:txBody>
+      </p:sp>
+      <p:sp>
+        <p:nvSpPr>
+          <p:cNvPr id="88" name="TextBox 87"/>
+          <p:cNvSpPr txBox="1"/>
+          <p:nvPr/>
+        </p:nvSpPr>
+        <p:spPr>
+          <a:xfrm>
+            <a:off x="32552640" y="8737092"/>
+            <a:ext cx="10607040" cy="365760"/>
+          </a:xfrm>
+          <a:prstGeom prst="rect">
+            <a:avLst/>
+          </a:prstGeom>
+          <a:noFill/>
+        </p:spPr>
+        <p:txBody>
+          <a:bodyPr wrap="square" lIns="0" rIns="0" tIns="0" bIns="0">
+            <a:spAutoFit/>
+          </a:bodyPr>
+          <a:lstStyle/>
+          <a:p>
+            <a:pPr algn="l">
+              <a:lnSpc>
+                <a:spcPct val="122000"/>
+              </a:lnSpc>
+              <a:spcAft>
+                <a:spcPts val="600"/>
+              </a:spcAft>
+            </a:pPr>
+            <a:r>
+              <a:rPr sz="1600" b="0">
+                <a:solidFill>
+                  <a:srgbClr val="6E6759"/>
+                </a:solidFill>
+                <a:latin typeface="Arial"/>
+              </a:rPr>
+              <a:t>joystick commands through the platform</a:t>
+            </a:r>
+          </a:p>
+        </p:txBody>
+      </p:sp>
+      <p:sp>
+        <p:nvSpPr>
+          <p:cNvPr id="89" name="TextBox 88"/>
+          <p:cNvSpPr txBox="1"/>
+          <p:nvPr/>
+        </p:nvSpPr>
+        <p:spPr>
+          <a:xfrm>
+            <a:off x="32552640" y="9207500"/>
+            <a:ext cx="10607040" cy="365760"/>
+          </a:xfrm>
+          <a:prstGeom prst="rect">
+            <a:avLst/>
+          </a:prstGeom>
+          <a:noFill/>
+        </p:spPr>
+        <p:txBody>
+          <a:bodyPr wrap="square" lIns="0" rIns="0" tIns="0" bIns="0">
+            <a:spAutoFit/>
+          </a:bodyPr>
+          <a:lstStyle/>
+          <a:p>
+            <a:pPr algn="l">
+              <a:lnSpc>
+                <a:spcPct val="95000"/>
+              </a:lnSpc>
+              <a:spcAft>
+                <a:spcPts val="0"/>
+              </a:spcAft>
+            </a:pPr>
+            <a:r>
               <a:rPr sz="3400" b="1">
                 <a:solidFill>
                   <a:srgbClr val="2B2A26"/>
@@ -6410,13 +6830,13 @@
       </p:sp>
       <p:sp>
         <p:nvSpPr>
-          <p:cNvPr id="80" name="Rectangle 79"/>
+          <p:cNvPr id="90" name="Rectangle 89"/>
           <p:cNvSpPr/>
           <p:nvPr/>
         </p:nvSpPr>
         <p:spPr>
           <a:xfrm>
-            <a:off x="32552640" y="8495284"/>
+            <a:off x="32552640" y="9768840"/>
             <a:ext cx="10607040" cy="27432"/>
           </a:xfrm>
           <a:prstGeom prst="rect">
@@ -6454,13 +6874,13 @@
       </p:sp>
       <p:sp>
         <p:nvSpPr>
-          <p:cNvPr id="81" name="TextBox 80"/>
+          <p:cNvPr id="91" name="TextBox 90"/>
           <p:cNvSpPr txBox="1"/>
           <p:nvPr/>
         </p:nvSpPr>
         <p:spPr>
           <a:xfrm>
-            <a:off x="32552640" y="8824467"/>
+            <a:off x="32552640" y="10098024"/>
             <a:ext cx="10607040" cy="365760"/>
           </a:xfrm>
           <a:prstGeom prst="rect">
@@ -6496,13 +6916,13 @@
       </p:sp>
       <p:sp>
         <p:nvSpPr>
-          <p:cNvPr id="82" name="TextBox 81"/>
+          <p:cNvPr id="92" name="TextBox 91"/>
           <p:cNvSpPr txBox="1"/>
           <p:nvPr/>
         </p:nvSpPr>
         <p:spPr>
           <a:xfrm>
-            <a:off x="32552640" y="10935716"/>
+            <a:off x="32552640" y="12209272"/>
             <a:ext cx="10607040" cy="365760"/>
           </a:xfrm>
           <a:prstGeom prst="rect">
@@ -6538,13 +6958,13 @@
       </p:sp>
       <p:sp>
         <p:nvSpPr>
-          <p:cNvPr id="83" name="Rectangle 82"/>
+          <p:cNvPr id="93" name="Rectangle 92"/>
           <p:cNvSpPr/>
           <p:nvPr/>
         </p:nvSpPr>
         <p:spPr>
           <a:xfrm>
-            <a:off x="32552640" y="11497056"/>
+            <a:off x="32552640" y="12770612"/>
             <a:ext cx="10607040" cy="27432"/>
           </a:xfrm>
           <a:prstGeom prst="rect">
@@ -6582,13 +7002,13 @@
       </p:sp>
       <p:sp>
         <p:nvSpPr>
-          <p:cNvPr id="84" name="TextBox 83"/>
+          <p:cNvPr id="94" name="TextBox 93"/>
           <p:cNvSpPr txBox="1"/>
           <p:nvPr/>
         </p:nvSpPr>
         <p:spPr>
           <a:xfrm>
-            <a:off x="32552640" y="11826239"/>
+            <a:off x="32552640" y="13099796"/>
             <a:ext cx="10607040" cy="365760"/>
           </a:xfrm>
           <a:prstGeom prst="rect">
@@ -6624,13 +7044,13 @@
       </p:sp>
       <p:sp>
         <p:nvSpPr>
-          <p:cNvPr id="85" name="TextBox 84"/>
+          <p:cNvPr id="95" name="TextBox 94"/>
           <p:cNvSpPr txBox="1"/>
           <p:nvPr/>
         </p:nvSpPr>
         <p:spPr>
           <a:xfrm>
-            <a:off x="32552640" y="13627607"/>
+            <a:off x="32552640" y="14901164"/>
             <a:ext cx="10607040" cy="365760"/>
           </a:xfrm>
           <a:prstGeom prst="rect">
@@ -6666,13 +7086,13 @@
       </p:sp>
       <p:sp>
         <p:nvSpPr>
-          <p:cNvPr id="86" name="Rectangle 85"/>
+          <p:cNvPr id="96" name="Rectangle 95"/>
           <p:cNvSpPr/>
           <p:nvPr/>
         </p:nvSpPr>
         <p:spPr>
           <a:xfrm>
-            <a:off x="32552640" y="14188947"/>
+            <a:off x="32552640" y="15462504"/>
             <a:ext cx="10607040" cy="27432"/>
           </a:xfrm>
           <a:prstGeom prst="rect">
@@ -6710,13 +7130,13 @@
       </p:sp>
       <p:sp>
         <p:nvSpPr>
-          <p:cNvPr id="87" name="TextBox 86"/>
+          <p:cNvPr id="97" name="TextBox 96"/>
           <p:cNvSpPr txBox="1"/>
           <p:nvPr/>
         </p:nvSpPr>
         <p:spPr>
           <a:xfrm>
-            <a:off x="32552640" y="14518131"/>
+            <a:off x="32552640" y="15791688"/>
             <a:ext cx="10607040" cy="365760"/>
           </a:xfrm>
           <a:prstGeom prst="rect">
@@ -6752,13 +7172,13 @@
       </p:sp>
       <p:sp>
         <p:nvSpPr>
-          <p:cNvPr id="88" name="TextBox 87"/>
+          <p:cNvPr id="98" name="TextBox 97"/>
           <p:cNvSpPr txBox="1"/>
           <p:nvPr/>
         </p:nvSpPr>
         <p:spPr>
           <a:xfrm>
-            <a:off x="32552640" y="16319500"/>
+            <a:off x="32552640" y="17593056"/>
             <a:ext cx="10607040" cy="365760"/>
           </a:xfrm>
           <a:prstGeom prst="rect">
@@ -6794,13 +7214,13 @@
       </p:sp>
       <p:sp>
         <p:nvSpPr>
-          <p:cNvPr id="89" name="Rectangle 88"/>
+          <p:cNvPr id="99" name="Rectangle 98"/>
           <p:cNvSpPr/>
           <p:nvPr/>
         </p:nvSpPr>
         <p:spPr>
           <a:xfrm>
-            <a:off x="32552640" y="16880839"/>
+            <a:off x="32552640" y="18154396"/>
             <a:ext cx="10607040" cy="27432"/>
           </a:xfrm>
           <a:prstGeom prst="rect">
@@ -6838,13 +7258,13 @@
       </p:sp>
       <p:sp>
         <p:nvSpPr>
-          <p:cNvPr id="90" name="TextBox 89"/>
+          <p:cNvPr id="100" name="TextBox 99"/>
           <p:cNvSpPr txBox="1"/>
           <p:nvPr/>
         </p:nvSpPr>
         <p:spPr>
           <a:xfrm>
-            <a:off x="32552640" y="17210023"/>
+            <a:off x="32552640" y="18483580"/>
             <a:ext cx="10607040" cy="365760"/>
           </a:xfrm>
           <a:prstGeom prst="rect">
@@ -6880,13 +7300,13 @@
       </p:sp>
       <p:sp>
         <p:nvSpPr>
-          <p:cNvPr id="91" name="TextBox 90"/>
+          <p:cNvPr id="101" name="TextBox 100"/>
           <p:cNvSpPr txBox="1"/>
           <p:nvPr/>
         </p:nvSpPr>
         <p:spPr>
           <a:xfrm>
-            <a:off x="32552640" y="19011392"/>
+            <a:off x="32552640" y="20284948"/>
             <a:ext cx="10607040" cy="365760"/>
           </a:xfrm>
           <a:prstGeom prst="rect">
@@ -6909,6 +7329,90 @@
               </a:spcAft>
             </a:pPr>
             <a:r>
+              <a:rPr sz="6200" b="1">
+                <a:solidFill>
+                  <a:srgbClr val="8A4B1E"/>
+                </a:solidFill>
+                <a:latin typeface="Arial Narrow"/>
+              </a:rPr>
+              <a:t>0</a:t>
+            </a:r>
+          </a:p>
+        </p:txBody>
+      </p:sp>
+      <p:sp>
+        <p:nvSpPr>
+          <p:cNvPr id="102" name="TextBox 101"/>
+          <p:cNvSpPr txBox="1"/>
+          <p:nvPr/>
+        </p:nvSpPr>
+        <p:spPr>
+          <a:xfrm>
+            <a:off x="32552640" y="21088096"/>
+            <a:ext cx="10607040" cy="365760"/>
+          </a:xfrm>
+          <a:prstGeom prst="rect">
+            <a:avLst/>
+          </a:prstGeom>
+          <a:noFill/>
+        </p:spPr>
+        <p:txBody>
+          <a:bodyPr wrap="square" lIns="0" rIns="0" tIns="0" bIns="0">
+            <a:spAutoFit/>
+          </a:bodyPr>
+          <a:lstStyle/>
+          <a:p>
+            <a:pPr algn="l">
+              <a:lnSpc>
+                <a:spcPct val="122000"/>
+              </a:lnSpc>
+              <a:spcAft>
+                <a:spcPts val="600"/>
+              </a:spcAft>
+            </a:pPr>
+            <a:r>
+              <a:rPr sz="1600" b="0">
+                <a:solidFill>
+                  <a:srgbClr val="6E6759"/>
+                </a:solidFill>
+                <a:latin typeface="Arial"/>
+              </a:rPr>
+              <a:t>times the laser has been fired by the platform</a:t>
+            </a:r>
+          </a:p>
+        </p:txBody>
+      </p:sp>
+      <p:sp>
+        <p:nvSpPr>
+          <p:cNvPr id="103" name="TextBox 102"/>
+          <p:cNvSpPr txBox="1"/>
+          <p:nvPr/>
+        </p:nvSpPr>
+        <p:spPr>
+          <a:xfrm>
+            <a:off x="32552640" y="21558504"/>
+            <a:ext cx="10607040" cy="365760"/>
+          </a:xfrm>
+          <a:prstGeom prst="rect">
+            <a:avLst/>
+          </a:prstGeom>
+          <a:noFill/>
+        </p:spPr>
+        <p:txBody>
+          <a:bodyPr wrap="square" lIns="0" rIns="0" tIns="0" bIns="0">
+            <a:spAutoFit/>
+          </a:bodyPr>
+          <a:lstStyle/>
+          <a:p>
+            <a:pPr algn="l">
+              <a:lnSpc>
+                <a:spcPct val="95000"/>
+              </a:lnSpc>
+              <a:spcAft>
+                <a:spcPts val="0"/>
+              </a:spcAft>
+            </a:pPr>
+            <a:r>
               <a:rPr sz="3400" b="1">
                 <a:solidFill>
                   <a:srgbClr val="2B2A26"/>
@@ -6922,13 +7426,13 @@
       </p:sp>
       <p:sp>
         <p:nvSpPr>
-          <p:cNvPr id="92" name="Rectangle 91"/>
+          <p:cNvPr id="104" name="Rectangle 103"/>
           <p:cNvSpPr/>
           <p:nvPr/>
         </p:nvSpPr>
         <p:spPr>
           <a:xfrm>
-            <a:off x="32552640" y="19572732"/>
+            <a:off x="32552640" y="22119844"/>
             <a:ext cx="10607040" cy="27432"/>
           </a:xfrm>
           <a:prstGeom prst="rect">
@@ -6966,13 +7470,13 @@
       </p:sp>
       <p:sp>
         <p:nvSpPr>
-          <p:cNvPr id="93" name="TextBox 92"/>
+          <p:cNvPr id="105" name="TextBox 104"/>
           <p:cNvSpPr txBox="1"/>
           <p:nvPr/>
         </p:nvSpPr>
         <p:spPr>
           <a:xfrm>
-            <a:off x="32552640" y="19901916"/>
+            <a:off x="32552640" y="22449028"/>
             <a:ext cx="10607040" cy="365760"/>
           </a:xfrm>
           <a:prstGeom prst="rect">
@@ -7008,7 +7512,7 @@
       </p:sp>
       <p:sp>
         <p:nvSpPr>
-          <p:cNvPr id="94" name="Rectangle 93"/>
+          <p:cNvPr id="106" name="Rectangle 105"/>
           <p:cNvSpPr/>
           <p:nvPr/>
         </p:nvSpPr>
@@ -7052,7 +7556,7 @@
       </p:sp>
       <p:sp>
         <p:nvSpPr>
-          <p:cNvPr id="95" name="TextBox 94"/>
+          <p:cNvPr id="107" name="TextBox 106"/>
           <p:cNvSpPr txBox="1"/>
           <p:nvPr/>
         </p:nvSpPr>
@@ -7094,7 +7598,7 @@
       </p:sp>
       <p:sp>
         <p:nvSpPr>
-          <p:cNvPr id="96" name="TextBox 95"/>
+          <p:cNvPr id="108" name="TextBox 107"/>
           <p:cNvSpPr txBox="1"/>
           <p:nvPr/>
         </p:nvSpPr>
@@ -7136,7 +7640,7 @@
       </p:sp>
       <p:sp>
         <p:nvSpPr>
-          <p:cNvPr id="97" name="TextBox 96"/>
+          <p:cNvPr id="109" name="TextBox 108"/>
           <p:cNvSpPr txBox="1"/>
           <p:nvPr/>
         </p:nvSpPr>
